--- a/slides/第12回_情報セキュリティ.pptx
+++ b/slides/第12回_情報セキュリティ.pptx
@@ -4599,7 +4599,7 @@
         <p:spPr>
           <a:xfrm>
             <a:off x="685800" y="1481328"/>
-            <a:ext cx="10789920" cy="621792"/>
+            <a:ext cx="10789920" cy="566928"/>
           </a:xfrm>
           <a:prstGeom prst="rect">
             <a:avLst/>
@@ -4640,7 +4640,7 @@
         </p:nvSpPr>
         <p:spPr>
           <a:xfrm>
-            <a:off x="685800" y="2185416"/>
+            <a:off x="685800" y="2130552"/>
             <a:ext cx="10789920" cy="713232"/>
           </a:xfrm>
           <a:prstGeom prst="roundRect">
@@ -4667,7 +4667,7 @@
         </p:nvSpPr>
         <p:spPr>
           <a:xfrm>
-            <a:off x="914400" y="2340864"/>
+            <a:off x="914400" y="2286000"/>
             <a:ext cx="10332720" cy="402336"/>
           </a:xfrm>
           <a:prstGeom prst="rect">
@@ -4706,7 +4706,7 @@
         </p:nvSpPr>
         <p:spPr>
           <a:xfrm>
-            <a:off x="1188720" y="3145536"/>
+            <a:off x="1188720" y="3090672"/>
             <a:ext cx="4572000" cy="457200"/>
           </a:xfrm>
           <a:prstGeom prst="rect">
@@ -4745,7 +4745,7 @@
         </p:nvSpPr>
         <p:spPr>
           <a:xfrm>
-            <a:off x="5943600" y="3273552"/>
+            <a:off x="5943600" y="3218688"/>
             <a:ext cx="640080" cy="201168"/>
           </a:xfrm>
           <a:prstGeom prst="rightArrow">
@@ -4765,7 +4765,7 @@
         </p:nvSpPr>
         <p:spPr>
           <a:xfrm>
-            <a:off x="6766560" y="3145536"/>
+            <a:off x="6766560" y="3090672"/>
             <a:ext cx="4206240" cy="457200"/>
           </a:xfrm>
           <a:prstGeom prst="rect">
@@ -4804,7 +4804,7 @@
         </p:nvSpPr>
         <p:spPr>
           <a:xfrm>
-            <a:off x="1188720" y="3767328"/>
+            <a:off x="1188720" y="3712464"/>
             <a:ext cx="4572000" cy="457200"/>
           </a:xfrm>
           <a:prstGeom prst="rect">
@@ -4843,7 +4843,7 @@
         </p:nvSpPr>
         <p:spPr>
           <a:xfrm>
-            <a:off x="5943600" y="3895344"/>
+            <a:off x="5943600" y="3840480"/>
             <a:ext cx="640080" cy="201168"/>
           </a:xfrm>
           <a:prstGeom prst="rightArrow">
@@ -4863,7 +4863,7 @@
         </p:nvSpPr>
         <p:spPr>
           <a:xfrm>
-            <a:off x="6766560" y="3767328"/>
+            <a:off x="6766560" y="3712464"/>
             <a:ext cx="4206240" cy="457200"/>
           </a:xfrm>
           <a:prstGeom prst="rect">
@@ -4902,7 +4902,7 @@
         </p:nvSpPr>
         <p:spPr>
           <a:xfrm>
-            <a:off x="1188720" y="4389120"/>
+            <a:off x="1188720" y="4334256"/>
             <a:ext cx="4572000" cy="457200"/>
           </a:xfrm>
           <a:prstGeom prst="rect">
@@ -4941,7 +4941,7 @@
         </p:nvSpPr>
         <p:spPr>
           <a:xfrm>
-            <a:off x="5943600" y="4517136"/>
+            <a:off x="5943600" y="4462272"/>
             <a:ext cx="640080" cy="201168"/>
           </a:xfrm>
           <a:prstGeom prst="rightArrow">
@@ -4961,7 +4961,7 @@
         </p:nvSpPr>
         <p:spPr>
           <a:xfrm>
-            <a:off x="6766560" y="4389120"/>
+            <a:off x="6766560" y="4334256"/>
             <a:ext cx="4206240" cy="457200"/>
           </a:xfrm>
           <a:prstGeom prst="rect">
@@ -5911,45 +5911,6 @@
           </a:prstGeom>
         </p:spPr>
       </p:pic>
-      <p:sp>
-        <p:nvSpPr>
-          <p:cNvPr id="7" name="Text 4"/>
-          <p:cNvSpPr/>
-          <p:nvPr/>
-        </p:nvSpPr>
-        <p:spPr>
-          <a:xfrm>
-            <a:off x="685800" y="5687568"/>
-            <a:ext cx="10789920" cy="365760"/>
-          </a:xfrm>
-          <a:prstGeom prst="rect">
-            <a:avLst/>
-          </a:prstGeom>
-          <a:noFill/>
-          <a:ln/>
-        </p:spPr>
-        <p:txBody>
-          <a:bodyPr wrap="square" lIns="0" tIns="0" rIns="0" bIns="0" rtlCol="0" anchor="ctr"/>
-          <a:lstStyle/>
-          <a:p>
-            <a:pPr algn="ctr" indent="0" marL="0">
-              <a:buNone/>
-            </a:pPr>
-            <a:r>
-              <a:rPr lang="en-US" sz="1500" dirty="0">
-                <a:solidFill>
-                  <a:srgbClr val="16191D"/>
-                </a:solidFill>
-                <a:latin typeface="Yu Gothic" pitchFamily="34" charset="0"/>
-                <a:ea typeface="Yu Gothic" pitchFamily="34" charset="-122"/>
-                <a:cs typeface="Yu Gothic" pitchFamily="34" charset="-120"/>
-              </a:rPr>
-              <a:t>秘密鍵を持つのは本人だけなので、それを作れたのは本人しかいない。</a:t>
-            </a:r>
-            <a:endParaRPr lang="en-US" sz="1500" dirty="0"/>
-          </a:p>
-        </p:txBody>
-      </p:sp>
     </p:spTree>
   </p:cSld>
   <p:clrMapOvr>
@@ -7007,7 +6968,7 @@
         <p:spPr>
           <a:xfrm>
             <a:off x="685800" y="1481328"/>
-            <a:ext cx="10789920" cy="621792"/>
+            <a:ext cx="10789920" cy="566928"/>
           </a:xfrm>
           <a:prstGeom prst="rect">
             <a:avLst/>
@@ -7048,7 +7009,7 @@
         </p:nvSpPr>
         <p:spPr>
           <a:xfrm>
-            <a:off x="685800" y="2185416"/>
+            <a:off x="685800" y="2130552"/>
             <a:ext cx="10789920" cy="713232"/>
           </a:xfrm>
           <a:prstGeom prst="roundRect">
@@ -7075,7 +7036,7 @@
         </p:nvSpPr>
         <p:spPr>
           <a:xfrm>
-            <a:off x="914400" y="2340864"/>
+            <a:off x="914400" y="2286000"/>
             <a:ext cx="10332720" cy="402336"/>
           </a:xfrm>
           <a:prstGeom prst="rect">
@@ -7114,7 +7075,7 @@
         </p:nvSpPr>
         <p:spPr>
           <a:xfrm>
-            <a:off x="1188720" y="3145536"/>
+            <a:off x="1188720" y="3090672"/>
             <a:ext cx="4572000" cy="457200"/>
           </a:xfrm>
           <a:prstGeom prst="rect">
@@ -7153,7 +7114,7 @@
         </p:nvSpPr>
         <p:spPr>
           <a:xfrm>
-            <a:off x="5943600" y="3273552"/>
+            <a:off x="5943600" y="3218688"/>
             <a:ext cx="640080" cy="201168"/>
           </a:xfrm>
           <a:prstGeom prst="rightArrow">
@@ -7173,7 +7134,7 @@
         </p:nvSpPr>
         <p:spPr>
           <a:xfrm>
-            <a:off x="6766560" y="3145536"/>
+            <a:off x="6766560" y="3090672"/>
             <a:ext cx="4206240" cy="457200"/>
           </a:xfrm>
           <a:prstGeom prst="rect">
@@ -7212,7 +7173,7 @@
         </p:nvSpPr>
         <p:spPr>
           <a:xfrm>
-            <a:off x="1188720" y="3767328"/>
+            <a:off x="1188720" y="3712464"/>
             <a:ext cx="4572000" cy="457200"/>
           </a:xfrm>
           <a:prstGeom prst="rect">
@@ -7251,7 +7212,7 @@
         </p:nvSpPr>
         <p:spPr>
           <a:xfrm>
-            <a:off x="5943600" y="3895344"/>
+            <a:off x="5943600" y="3840480"/>
             <a:ext cx="640080" cy="201168"/>
           </a:xfrm>
           <a:prstGeom prst="rightArrow">
@@ -7271,7 +7232,7 @@
         </p:nvSpPr>
         <p:spPr>
           <a:xfrm>
-            <a:off x="6766560" y="3767328"/>
+            <a:off x="6766560" y="3712464"/>
             <a:ext cx="4206240" cy="457200"/>
           </a:xfrm>
           <a:prstGeom prst="rect">
@@ -7310,7 +7271,7 @@
         </p:nvSpPr>
         <p:spPr>
           <a:xfrm>
-            <a:off x="1188720" y="4389120"/>
+            <a:off x="1188720" y="4334256"/>
             <a:ext cx="4572000" cy="457200"/>
           </a:xfrm>
           <a:prstGeom prst="rect">
@@ -7349,7 +7310,7 @@
         </p:nvSpPr>
         <p:spPr>
           <a:xfrm>
-            <a:off x="5943600" y="4517136"/>
+            <a:off x="5943600" y="4462272"/>
             <a:ext cx="640080" cy="201168"/>
           </a:xfrm>
           <a:prstGeom prst="rightArrow">
@@ -7369,7 +7330,7 @@
         </p:nvSpPr>
         <p:spPr>
           <a:xfrm>
-            <a:off x="6766560" y="4389120"/>
+            <a:off x="6766560" y="4334256"/>
             <a:ext cx="4206240" cy="457200"/>
           </a:xfrm>
           <a:prstGeom prst="rect">
@@ -7615,45 +7576,6 @@
           </a:prstGeom>
         </p:spPr>
       </p:pic>
-      <p:sp>
-        <p:nvSpPr>
-          <p:cNvPr id="6" name="Text 3"/>
-          <p:cNvSpPr/>
-          <p:nvPr/>
-        </p:nvSpPr>
-        <p:spPr>
-          <a:xfrm>
-            <a:off x="685800" y="5687568"/>
-            <a:ext cx="10789920" cy="365760"/>
-          </a:xfrm>
-          <a:prstGeom prst="rect">
-            <a:avLst/>
-          </a:prstGeom>
-          <a:noFill/>
-          <a:ln/>
-        </p:spPr>
-        <p:txBody>
-          <a:bodyPr wrap="square" lIns="0" tIns="0" rIns="0" bIns="0" rtlCol="0" anchor="ctr"/>
-          <a:lstStyle/>
-          <a:p>
-            <a:pPr algn="ctr" indent="0" marL="0">
-              <a:buNone/>
-            </a:pPr>
-            <a:r>
-              <a:rPr lang="en-US" sz="1500" dirty="0">
-                <a:solidFill>
-                  <a:srgbClr val="16191D"/>
-                </a:solidFill>
-                <a:latin typeface="Yu Gothic" pitchFamily="34" charset="0"/>
-                <a:ea typeface="Yu Gothic" pitchFamily="34" charset="-122"/>
-                <a:cs typeface="Yu Gothic" pitchFamily="34" charset="-120"/>
-              </a:rPr>
-              <a:t>最終的な信頼の根拠は「ブラウザや OS の開発元が、この CA を信頼できると判断した」ことである。</a:t>
-            </a:r>
-            <a:endParaRPr lang="en-US" sz="1500" dirty="0"/>
-          </a:p>
-        </p:txBody>
-      </p:sp>
     </p:spTree>
   </p:cSld>
   <p:clrMapOvr>
@@ -7812,7 +7734,7 @@
         <p:spPr>
           <a:xfrm>
             <a:off x="685800" y="1481328"/>
-            <a:ext cx="10789920" cy="621792"/>
+            <a:ext cx="10789920" cy="566928"/>
           </a:xfrm>
           <a:prstGeom prst="rect">
             <a:avLst/>
@@ -7853,7 +7775,7 @@
         </p:nvSpPr>
         <p:spPr>
           <a:xfrm>
-            <a:off x="685800" y="2139696"/>
+            <a:off x="685800" y="2084832"/>
             <a:ext cx="3444240" cy="1645920"/>
           </a:xfrm>
           <a:prstGeom prst="roundRect">
@@ -7880,7 +7802,7 @@
         </p:nvSpPr>
         <p:spPr>
           <a:xfrm>
-            <a:off x="868680" y="2276856"/>
+            <a:off x="868680" y="2221992"/>
             <a:ext cx="3078480" cy="310896"/>
           </a:xfrm>
           <a:prstGeom prst="rect">
@@ -7919,7 +7841,7 @@
         </p:nvSpPr>
         <p:spPr>
           <a:xfrm>
-            <a:off x="868680" y="2624328"/>
+            <a:off x="868680" y="2569464"/>
             <a:ext cx="3078480" cy="1005840"/>
           </a:xfrm>
           <a:prstGeom prst="rect">
@@ -7961,7 +7883,7 @@
         </p:nvSpPr>
         <p:spPr>
           <a:xfrm>
-            <a:off x="4358640" y="2139696"/>
+            <a:off x="4358640" y="2084832"/>
             <a:ext cx="3444240" cy="1645920"/>
           </a:xfrm>
           <a:prstGeom prst="roundRect">
@@ -7988,7 +7910,7 @@
         </p:nvSpPr>
         <p:spPr>
           <a:xfrm>
-            <a:off x="4541520" y="2276856"/>
+            <a:off x="4541520" y="2221992"/>
             <a:ext cx="3078480" cy="310896"/>
           </a:xfrm>
           <a:prstGeom prst="rect">
@@ -8027,7 +7949,7 @@
         </p:nvSpPr>
         <p:spPr>
           <a:xfrm>
-            <a:off x="4541520" y="2624328"/>
+            <a:off x="4541520" y="2569464"/>
             <a:ext cx="3078480" cy="1005840"/>
           </a:xfrm>
           <a:prstGeom prst="rect">
@@ -8069,7 +7991,7 @@
         </p:nvSpPr>
         <p:spPr>
           <a:xfrm>
-            <a:off x="8031480" y="2139696"/>
+            <a:off x="8031480" y="2084832"/>
             <a:ext cx="3444240" cy="1645920"/>
           </a:xfrm>
           <a:prstGeom prst="roundRect">
@@ -8096,7 +8018,7 @@
         </p:nvSpPr>
         <p:spPr>
           <a:xfrm>
-            <a:off x="8214360" y="2276856"/>
+            <a:off x="8214360" y="2221992"/>
             <a:ext cx="3078480" cy="310896"/>
           </a:xfrm>
           <a:prstGeom prst="rect">
@@ -8135,7 +8057,7 @@
         </p:nvSpPr>
         <p:spPr>
           <a:xfrm>
-            <a:off x="8214360" y="2624328"/>
+            <a:off x="8214360" y="2569464"/>
             <a:ext cx="3078480" cy="1005840"/>
           </a:xfrm>
           <a:prstGeom prst="rect">
@@ -10659,7 +10581,7 @@
         <p:spPr>
           <a:xfrm>
             <a:off x="685800" y="1481328"/>
-            <a:ext cx="10789920" cy="621792"/>
+            <a:ext cx="10789920" cy="365760"/>
           </a:xfrm>
           <a:prstGeom prst="rect">
             <a:avLst/>
@@ -10707,7 +10629,7 @@
           </p:nvPr>
         </p:nvGraphicFramePr>
         <p:xfrm>
-          <a:off x="685800" y="2139696"/>
+          <a:off x="685800" y="1883664"/>
           <a:ext cx="10789920" cy="914400"/>
         </p:xfrm>
         <a:graphic>
@@ -11555,7 +11477,7 @@
         </p:nvSpPr>
         <p:spPr>
           <a:xfrm>
-            <a:off x="685800" y="4050792"/>
+            <a:off x="685800" y="3794760"/>
             <a:ext cx="10789920" cy="658368"/>
           </a:xfrm>
           <a:prstGeom prst="roundRect">
@@ -11582,7 +11504,7 @@
         </p:nvSpPr>
         <p:spPr>
           <a:xfrm>
-            <a:off x="914400" y="4197096"/>
+            <a:off x="914400" y="3941064"/>
             <a:ext cx="10332720" cy="365760"/>
           </a:xfrm>
           <a:prstGeom prst="rect">
@@ -11621,7 +11543,7 @@
         </p:nvSpPr>
         <p:spPr>
           <a:xfrm>
-            <a:off x="685800" y="4873752"/>
+            <a:off x="685800" y="4617720"/>
             <a:ext cx="10789920" cy="457200"/>
           </a:xfrm>
           <a:prstGeom prst="rect">
@@ -11833,7 +11755,7 @@
         <p:spPr>
           <a:xfrm>
             <a:off x="685800" y="1481328"/>
-            <a:ext cx="10789920" cy="621792"/>
+            <a:ext cx="10789920" cy="566928"/>
           </a:xfrm>
           <a:prstGeom prst="rect">
             <a:avLst/>
@@ -11874,7 +11796,7 @@
         </p:nvSpPr>
         <p:spPr>
           <a:xfrm>
-            <a:off x="685800" y="2185416"/>
+            <a:off x="685800" y="2130552"/>
             <a:ext cx="10789920" cy="713232"/>
           </a:xfrm>
           <a:prstGeom prst="roundRect">
@@ -11901,7 +11823,7 @@
         </p:nvSpPr>
         <p:spPr>
           <a:xfrm>
-            <a:off x="914400" y="2340864"/>
+            <a:off x="914400" y="2286000"/>
             <a:ext cx="10332720" cy="402336"/>
           </a:xfrm>
           <a:prstGeom prst="rect">
@@ -11940,7 +11862,7 @@
         </p:nvSpPr>
         <p:spPr>
           <a:xfrm>
-            <a:off x="1188720" y="3145536"/>
+            <a:off x="1188720" y="3090672"/>
             <a:ext cx="4572000" cy="457200"/>
           </a:xfrm>
           <a:prstGeom prst="rect">
@@ -11979,7 +11901,7 @@
         </p:nvSpPr>
         <p:spPr>
           <a:xfrm>
-            <a:off x="5943600" y="3273552"/>
+            <a:off x="5943600" y="3218688"/>
             <a:ext cx="640080" cy="201168"/>
           </a:xfrm>
           <a:prstGeom prst="rightArrow">
@@ -11999,7 +11921,7 @@
         </p:nvSpPr>
         <p:spPr>
           <a:xfrm>
-            <a:off x="6766560" y="3145536"/>
+            <a:off x="6766560" y="3090672"/>
             <a:ext cx="4206240" cy="457200"/>
           </a:xfrm>
           <a:prstGeom prst="rect">
@@ -12038,7 +11960,7 @@
         </p:nvSpPr>
         <p:spPr>
           <a:xfrm>
-            <a:off x="1188720" y="3767328"/>
+            <a:off x="1188720" y="3712464"/>
             <a:ext cx="4572000" cy="457200"/>
           </a:xfrm>
           <a:prstGeom prst="rect">
@@ -12077,7 +11999,7 @@
         </p:nvSpPr>
         <p:spPr>
           <a:xfrm>
-            <a:off x="5943600" y="3895344"/>
+            <a:off x="5943600" y="3840480"/>
             <a:ext cx="640080" cy="201168"/>
           </a:xfrm>
           <a:prstGeom prst="rightArrow">
@@ -12097,7 +12019,7 @@
         </p:nvSpPr>
         <p:spPr>
           <a:xfrm>
-            <a:off x="6766560" y="3767328"/>
+            <a:off x="6766560" y="3712464"/>
             <a:ext cx="4206240" cy="457200"/>
           </a:xfrm>
           <a:prstGeom prst="rect">
@@ -12136,7 +12058,7 @@
         </p:nvSpPr>
         <p:spPr>
           <a:xfrm>
-            <a:off x="1188720" y="4389120"/>
+            <a:off x="1188720" y="4334256"/>
             <a:ext cx="4572000" cy="457200"/>
           </a:xfrm>
           <a:prstGeom prst="rect">
@@ -12175,7 +12097,7 @@
         </p:nvSpPr>
         <p:spPr>
           <a:xfrm>
-            <a:off x="5943600" y="4517136"/>
+            <a:off x="5943600" y="4462272"/>
             <a:ext cx="640080" cy="201168"/>
           </a:xfrm>
           <a:prstGeom prst="rightArrow">
@@ -12195,7 +12117,7 @@
         </p:nvSpPr>
         <p:spPr>
           <a:xfrm>
-            <a:off x="6766560" y="4389120"/>
+            <a:off x="6766560" y="4334256"/>
             <a:ext cx="4206240" cy="457200"/>
           </a:xfrm>
           <a:prstGeom prst="rect">
@@ -15875,7 +15797,7 @@
         <p:spPr>
           <a:xfrm>
             <a:off x="685800" y="1481328"/>
-            <a:ext cx="10789920" cy="621792"/>
+            <a:ext cx="10789920" cy="566928"/>
           </a:xfrm>
           <a:prstGeom prst="rect">
             <a:avLst/>
@@ -15916,7 +15838,7 @@
         </p:nvSpPr>
         <p:spPr>
           <a:xfrm>
-            <a:off x="685800" y="2139696"/>
+            <a:off x="685800" y="2084832"/>
             <a:ext cx="3444240" cy="1554480"/>
           </a:xfrm>
           <a:prstGeom prst="roundRect">
@@ -15943,7 +15865,7 @@
         </p:nvSpPr>
         <p:spPr>
           <a:xfrm>
-            <a:off x="868680" y="2276856"/>
+            <a:off x="868680" y="2221992"/>
             <a:ext cx="3078480" cy="310896"/>
           </a:xfrm>
           <a:prstGeom prst="rect">
@@ -15982,7 +15904,7 @@
         </p:nvSpPr>
         <p:spPr>
           <a:xfrm>
-            <a:off x="868680" y="2624328"/>
+            <a:off x="868680" y="2569464"/>
             <a:ext cx="3078480" cy="914400"/>
           </a:xfrm>
           <a:prstGeom prst="rect">
@@ -16024,7 +15946,7 @@
         </p:nvSpPr>
         <p:spPr>
           <a:xfrm>
-            <a:off x="4358640" y="2139696"/>
+            <a:off x="4358640" y="2084832"/>
             <a:ext cx="3444240" cy="1554480"/>
           </a:xfrm>
           <a:prstGeom prst="roundRect">
@@ -16051,7 +15973,7 @@
         </p:nvSpPr>
         <p:spPr>
           <a:xfrm>
-            <a:off x="4541520" y="2276856"/>
+            <a:off x="4541520" y="2221992"/>
             <a:ext cx="3078480" cy="310896"/>
           </a:xfrm>
           <a:prstGeom prst="rect">
@@ -16090,7 +16012,7 @@
         </p:nvSpPr>
         <p:spPr>
           <a:xfrm>
-            <a:off x="4541520" y="2624328"/>
+            <a:off x="4541520" y="2569464"/>
             <a:ext cx="3078480" cy="914400"/>
           </a:xfrm>
           <a:prstGeom prst="rect">
@@ -16132,7 +16054,7 @@
         </p:nvSpPr>
         <p:spPr>
           <a:xfrm>
-            <a:off x="8031480" y="2139696"/>
+            <a:off x="8031480" y="2084832"/>
             <a:ext cx="3444240" cy="1554480"/>
           </a:xfrm>
           <a:prstGeom prst="roundRect">
@@ -16159,7 +16081,7 @@
         </p:nvSpPr>
         <p:spPr>
           <a:xfrm>
-            <a:off x="8214360" y="2276856"/>
+            <a:off x="8214360" y="2221992"/>
             <a:ext cx="3078480" cy="310896"/>
           </a:xfrm>
           <a:prstGeom prst="rect">
@@ -16198,7 +16120,7 @@
         </p:nvSpPr>
         <p:spPr>
           <a:xfrm>
-            <a:off x="8214360" y="2624328"/>
+            <a:off x="8214360" y="2569464"/>
             <a:ext cx="3078480" cy="914400"/>
           </a:xfrm>
           <a:prstGeom prst="rect">
@@ -16240,7 +16162,7 @@
         </p:nvSpPr>
         <p:spPr>
           <a:xfrm>
-            <a:off x="685800" y="3986784"/>
+            <a:off x="685800" y="3931920"/>
             <a:ext cx="10789920" cy="786384"/>
           </a:xfrm>
           <a:prstGeom prst="roundRect">
@@ -16267,7 +16189,7 @@
         </p:nvSpPr>
         <p:spPr>
           <a:xfrm>
-            <a:off x="914400" y="4114800"/>
+            <a:off x="914400" y="4059936"/>
             <a:ext cx="10332720" cy="292608"/>
           </a:xfrm>
           <a:prstGeom prst="rect">
@@ -16306,7 +16228,7 @@
         </p:nvSpPr>
         <p:spPr>
           <a:xfrm>
-            <a:off x="914400" y="4425696"/>
+            <a:off x="914400" y="4370832"/>
             <a:ext cx="10332720" cy="292608"/>
           </a:xfrm>
           <a:prstGeom prst="rect">

--- a/slides/第12回_情報セキュリティ.pptx
+++ b/slides/第12回_情報セキュリティ.pptx
@@ -18015,7 +18015,7 @@
                 <a:ea typeface="Courier New" pitchFamily="34" charset="-122"/>
                 <a:cs typeface="Courier New" pitchFamily="34" charset="-120"/>
               </a:rPr>
-              <a:t>12-3</a:t>
+              <a:t>12-6</a:t>
             </a:r>
             <a:endParaRPr lang="en-US" sz="1300" dirty="0"/>
           </a:p>
@@ -18123,7 +18123,7 @@
                 <a:ea typeface="Courier New" pitchFamily="34" charset="-122"/>
                 <a:cs typeface="Courier New" pitchFamily="34" charset="-120"/>
               </a:rPr>
-              <a:t>12-4</a:t>
+              <a:t>12-7</a:t>
             </a:r>
             <a:endParaRPr lang="en-US" sz="1300" dirty="0"/>
           </a:p>
